--- a/doc/개발환경_설치매뉴얼(공통).pptx
+++ b/doc/개발환경_설치매뉴얼(공통).pptx
@@ -23,7 +23,6 @@
     <p:sldId id="282" r:id="rId17"/>
     <p:sldId id="283" r:id="rId18"/>
     <p:sldId id="284" r:id="rId19"/>
-    <p:sldId id="257" r:id="rId20"/>
   </p:sldIdLst>
   <p:sldSz cx="12192000" cy="6858000"/>
   <p:notesSz cx="6858000" cy="9144000"/>
@@ -122,6 +121,11 @@
       </a:defRPr>
     </a:lvl9pPr>
   </p:defaultTextStyle>
+  <p:extLst>
+    <p:ext uri="{EFAFB233-063F-42B5-8137-9DF3F51BA10A}">
+      <p15:sldGuideLst xmlns:p15="http://schemas.microsoft.com/office/powerpoint/2012/main"/>
+    </p:ext>
+  </p:extLst>
 </p:presentation>
 </file>
 
@@ -272,7 +276,7 @@
           <a:p>
             <a:fld id="{C78EFC4B-12E1-4690-8F2B-0F6B6D2E003E}" type="datetimeFigureOut">
               <a:rPr lang="ko-KR" altLang="en-US" smtClean="0"/>
-              <a:t>2025-09-05</a:t>
+              <a:t>2025-09-07</a:t>
             </a:fld>
             <a:endParaRPr lang="ko-KR" altLang="en-US"/>
           </a:p>
@@ -470,7 +474,7 @@
           <a:p>
             <a:fld id="{C78EFC4B-12E1-4690-8F2B-0F6B6D2E003E}" type="datetimeFigureOut">
               <a:rPr lang="ko-KR" altLang="en-US" smtClean="0"/>
-              <a:t>2025-09-05</a:t>
+              <a:t>2025-09-07</a:t>
             </a:fld>
             <a:endParaRPr lang="ko-KR" altLang="en-US"/>
           </a:p>
@@ -678,7 +682,7 @@
           <a:p>
             <a:fld id="{C78EFC4B-12E1-4690-8F2B-0F6B6D2E003E}" type="datetimeFigureOut">
               <a:rPr lang="ko-KR" altLang="en-US" smtClean="0"/>
-              <a:t>2025-09-05</a:t>
+              <a:t>2025-09-07</a:t>
             </a:fld>
             <a:endParaRPr lang="ko-KR" altLang="en-US"/>
           </a:p>
@@ -876,7 +880,7 @@
           <a:p>
             <a:fld id="{C78EFC4B-12E1-4690-8F2B-0F6B6D2E003E}" type="datetimeFigureOut">
               <a:rPr lang="ko-KR" altLang="en-US" smtClean="0"/>
-              <a:t>2025-09-05</a:t>
+              <a:t>2025-09-07</a:t>
             </a:fld>
             <a:endParaRPr lang="ko-KR" altLang="en-US"/>
           </a:p>
@@ -1151,7 +1155,7 @@
           <a:p>
             <a:fld id="{C78EFC4B-12E1-4690-8F2B-0F6B6D2E003E}" type="datetimeFigureOut">
               <a:rPr lang="ko-KR" altLang="en-US" smtClean="0"/>
-              <a:t>2025-09-05</a:t>
+              <a:t>2025-09-07</a:t>
             </a:fld>
             <a:endParaRPr lang="ko-KR" altLang="en-US"/>
           </a:p>
@@ -1416,7 +1420,7 @@
           <a:p>
             <a:fld id="{C78EFC4B-12E1-4690-8F2B-0F6B6D2E003E}" type="datetimeFigureOut">
               <a:rPr lang="ko-KR" altLang="en-US" smtClean="0"/>
-              <a:t>2025-09-05</a:t>
+              <a:t>2025-09-07</a:t>
             </a:fld>
             <a:endParaRPr lang="ko-KR" altLang="en-US"/>
           </a:p>
@@ -1828,7 +1832,7 @@
           <a:p>
             <a:fld id="{C78EFC4B-12E1-4690-8F2B-0F6B6D2E003E}" type="datetimeFigureOut">
               <a:rPr lang="ko-KR" altLang="en-US" smtClean="0"/>
-              <a:t>2025-09-05</a:t>
+              <a:t>2025-09-07</a:t>
             </a:fld>
             <a:endParaRPr lang="ko-KR" altLang="en-US"/>
           </a:p>
@@ -1969,7 +1973,7 @@
           <a:p>
             <a:fld id="{C78EFC4B-12E1-4690-8F2B-0F6B6D2E003E}" type="datetimeFigureOut">
               <a:rPr lang="ko-KR" altLang="en-US" smtClean="0"/>
-              <a:t>2025-09-05</a:t>
+              <a:t>2025-09-07</a:t>
             </a:fld>
             <a:endParaRPr lang="ko-KR" altLang="en-US"/>
           </a:p>
@@ -2082,7 +2086,7 @@
           <a:p>
             <a:fld id="{C78EFC4B-12E1-4690-8F2B-0F6B6D2E003E}" type="datetimeFigureOut">
               <a:rPr lang="ko-KR" altLang="en-US" smtClean="0"/>
-              <a:t>2025-09-05</a:t>
+              <a:t>2025-09-07</a:t>
             </a:fld>
             <a:endParaRPr lang="ko-KR" altLang="en-US"/>
           </a:p>
@@ -2393,7 +2397,7 @@
           <a:p>
             <a:fld id="{C78EFC4B-12E1-4690-8F2B-0F6B6D2E003E}" type="datetimeFigureOut">
               <a:rPr lang="ko-KR" altLang="en-US" smtClean="0"/>
-              <a:t>2025-09-05</a:t>
+              <a:t>2025-09-07</a:t>
             </a:fld>
             <a:endParaRPr lang="ko-KR" altLang="en-US"/>
           </a:p>
@@ -2681,7 +2685,7 @@
           <a:p>
             <a:fld id="{C78EFC4B-12E1-4690-8F2B-0F6B6D2E003E}" type="datetimeFigureOut">
               <a:rPr lang="ko-KR" altLang="en-US" smtClean="0"/>
-              <a:t>2025-09-05</a:t>
+              <a:t>2025-09-07</a:t>
             </a:fld>
             <a:endParaRPr lang="ko-KR" altLang="en-US"/>
           </a:p>
@@ -2922,7 +2926,7 @@
           <a:p>
             <a:fld id="{C78EFC4B-12E1-4690-8F2B-0F6B6D2E003E}" type="datetimeFigureOut">
               <a:rPr lang="ko-KR" altLang="en-US" smtClean="0"/>
-              <a:t>2025-09-05</a:t>
+              <a:t>2025-09-07</a:t>
             </a:fld>
             <a:endParaRPr lang="ko-KR" altLang="en-US"/>
           </a:p>
@@ -3390,8 +3394,39 @@
           <a:p>
             <a:r>
               <a:rPr lang="ko-KR" altLang="en-US" dirty="0"/>
-              <a:t>공통</a:t>
-            </a:r>
+              <a:t>공통 프로그램</a:t>
+            </a:r>
+            <a:br>
+              <a:rPr lang="en-US" altLang="ko-KR" dirty="0"/>
+            </a:br>
+            <a:r>
+              <a:rPr lang="en-US" altLang="ko-KR" dirty="0"/>
+              <a:t>(</a:t>
+            </a:r>
+            <a:r>
+              <a:rPr lang="en-US" altLang="ko-KR" dirty="0" err="1"/>
+              <a:t>Nodepad</a:t>
+            </a:r>
+            <a:r>
+              <a:rPr lang="en-US" altLang="ko-KR" dirty="0"/>
+              <a:t>++)</a:t>
+            </a:r>
+            <a:br>
+              <a:rPr lang="en-US" altLang="ko-KR" dirty="0"/>
+            </a:br>
+            <a:r>
+              <a:rPr lang="en-US" altLang="ko-KR" dirty="0"/>
+              <a:t>(</a:t>
+            </a:r>
+            <a:r>
+              <a:rPr lang="en-US" altLang="ko-KR" dirty="0" err="1"/>
+              <a:t>HeidiSQL</a:t>
+            </a:r>
+            <a:r>
+              <a:rPr lang="en-US" altLang="ko-KR" dirty="0"/>
+              <a:t>)</a:t>
+            </a:r>
+            <a:endParaRPr lang="ko-KR" altLang="en-US" dirty="0"/>
           </a:p>
         </p:txBody>
       </p:sp>
@@ -4308,86 +4343,6 @@
     <p:extLst>
       <p:ext uri="{BB962C8B-B14F-4D97-AF65-F5344CB8AC3E}">
         <p14:creationId xmlns:p14="http://schemas.microsoft.com/office/powerpoint/2010/main" val="3899849916"/>
-      </p:ext>
-    </p:extLst>
-  </p:cSld>
-  <p:clrMapOvr>
-    <a:masterClrMapping/>
-  </p:clrMapOvr>
-</p:sld>
-</file>
-
-<file path=ppt/slides/slide19.xml><?xml version="1.0" encoding="utf-8"?>
-<p:sld xmlns:a="http://schemas.openxmlformats.org/drawingml/2006/main" xmlns:r="http://schemas.openxmlformats.org/officeDocument/2006/relationships" xmlns:p="http://schemas.openxmlformats.org/presentationml/2006/main">
-  <p:cSld>
-    <p:spTree>
-      <p:nvGrpSpPr>
-        <p:cNvPr id="1" name=""/>
-        <p:cNvGrpSpPr/>
-        <p:nvPr/>
-      </p:nvGrpSpPr>
-      <p:grpSpPr>
-        <a:xfrm>
-          <a:off x="0" y="0"/>
-          <a:ext cx="0" cy="0"/>
-          <a:chOff x="0" y="0"/>
-          <a:chExt cx="0" cy="0"/>
-        </a:xfrm>
-      </p:grpSpPr>
-      <p:sp>
-        <p:nvSpPr>
-          <p:cNvPr id="2" name="제목 1">
-            <a:extLst>
-              <a:ext uri="{FF2B5EF4-FFF2-40B4-BE49-F238E27FC236}">
-                <a16:creationId xmlns:a16="http://schemas.microsoft.com/office/drawing/2014/main" id="{A6992D93-93D6-71BE-99A7-1011FA73CA02}"/>
-              </a:ext>
-            </a:extLst>
-          </p:cNvPr>
-          <p:cNvSpPr>
-            <a:spLocks noGrp="1"/>
-          </p:cNvSpPr>
-          <p:nvPr>
-            <p:ph type="title"/>
-          </p:nvPr>
-        </p:nvSpPr>
-        <p:spPr/>
-        <p:txBody>
-          <a:bodyPr/>
-          <a:lstStyle/>
-          <a:p>
-            <a:endParaRPr lang="ko-KR" altLang="en-US"/>
-          </a:p>
-        </p:txBody>
-      </p:sp>
-      <p:sp>
-        <p:nvSpPr>
-          <p:cNvPr id="3" name="내용 개체 틀 2">
-            <a:extLst>
-              <a:ext uri="{FF2B5EF4-FFF2-40B4-BE49-F238E27FC236}">
-                <a16:creationId xmlns:a16="http://schemas.microsoft.com/office/drawing/2014/main" id="{5EC582AB-5C19-8698-1B18-BD92C5000919}"/>
-              </a:ext>
-            </a:extLst>
-          </p:cNvPr>
-          <p:cNvSpPr>
-            <a:spLocks noGrp="1"/>
-          </p:cNvSpPr>
-          <p:nvPr>
-            <p:ph idx="1"/>
-          </p:nvPr>
-        </p:nvSpPr>
-        <p:spPr/>
-        <p:txBody>
-          <a:bodyPr/>
-          <a:lstStyle/>
-          <a:p>
-            <a:endParaRPr lang="ko-KR" altLang="en-US"/>
-          </a:p>
-        </p:txBody>
-      </p:sp>
-    </p:spTree>
-    <p:extLst>
-      <p:ext uri="{BB962C8B-B14F-4D97-AF65-F5344CB8AC3E}">
-        <p14:creationId xmlns:p14="http://schemas.microsoft.com/office/powerpoint/2010/main" val="2017279762"/>
       </p:ext>
     </p:extLst>
   </p:cSld>
